--- a/SESION_4/Sesion_4_Automatizacion_aprobaciones_mantenimiento.pptx
+++ b/SESION_4/Sesion_4_Automatizacion_aprobaciones_mantenimiento.pptx
@@ -8,6 +8,7 @@
     <p:sldId id="256" r:id="rId2"/>
     <p:sldId id="257" r:id="rId3"/>
     <p:sldId id="258" r:id="rId4"/>
+    <p:sldId id="283" r:id="rId34"/>
     <p:sldId id="259" r:id="rId5"/>
     <p:sldId id="260" r:id="rId6"/>
     <p:sldId id="261" r:id="rId7"/>
@@ -2224,6 +2225,94 @@
             <a:fld id="{F7021451-1387-4CA6-816F-3879F97B5CBC}" type="slidenum">
               <a:rPr lang="en-US"/>
               <a:t>27</a:t>
+            </a:fld>
+            <a:endParaRPr lang="en-US"/>
+          </a:p>
+        </p:txBody>
+      </p:sp>
+    </p:spTree>
+    <p:extLst>
+      <p:ext uri="{BB962C8B-B14F-4D97-AF65-F5344CB8AC3E}">
+        <p14:creationId xmlns:p14="http://schemas.microsoft.com/office/powerpoint/2010/main" val="1024086991"/>
+      </p:ext>
+    </p:extLst>
+  </p:cSld>
+  <p:clrMapOvr>
+    <a:masterClrMapping/>
+  </p:clrMapOvr>
+</p:notes>
+</file>
+
+<file path=ppt/notesSlides/notesSlide28.xml><?xml version="1.0" encoding="utf-8"?>
+<p:notes xmlns:a="http://schemas.openxmlformats.org/drawingml/2006/main" xmlns:r="http://schemas.openxmlformats.org/officeDocument/2006/relationships" xmlns:p="http://schemas.openxmlformats.org/presentationml/2006/main">
+  <p:cSld>
+    <p:spTree>
+      <p:nvGrpSpPr>
+        <p:cNvPr id="1" name=""/>
+        <p:cNvGrpSpPr/>
+        <p:nvPr/>
+      </p:nvGrpSpPr>
+      <p:grpSpPr>
+        <a:xfrm>
+          <a:off x="0" y="0"/>
+          <a:ext cx="0" cy="0"/>
+          <a:chOff x="0" y="0"/>
+          <a:chExt cx="0" cy="0"/>
+        </a:xfrm>
+      </p:grpSpPr>
+      <p:sp>
+        <p:nvSpPr>
+          <p:cNvPr id="2" name="Slide Image Placeholder 1"/>
+          <p:cNvSpPr>
+            <a:spLocks noGrp="1" noRot="1" noChangeAspect="1"/>
+          </p:cNvSpPr>
+          <p:nvPr>
+            <p:ph type="sldImg"/>
+          </p:nvPr>
+        </p:nvSpPr>
+        <p:spPr/>
+      </p:sp>
+      <p:sp>
+        <p:nvSpPr>
+          <p:cNvPr id="3" name="Notes Placeholder 2"/>
+          <p:cNvSpPr>
+            <a:spLocks noGrp="1"/>
+          </p:cNvSpPr>
+          <p:nvPr>
+            <p:ph type="body" idx="1"/>
+          </p:nvPr>
+        </p:nvSpPr>
+        <p:spPr/>
+        <p:txBody>
+          <a:bodyPr/>
+          <a:lstStyle/>
+          <a:p>
+            <a:r>
+              <a:rPr lang="en-US" dirty="0"/>
+              <a:t>Respuestas. 1) Un componente reutilizable con propiedades de entrada: se edita una vez en la biblioteca de componentes y se actualiza en todas las pantallas. 2) La validación del origen protege los datos pero avisa tarde, al enviar, y con un mensaje genérico; la de la app avisa mientras se escribe, deshabilita el botón de guardar y explica el error campo a campo. Las dos son necesarias. Preguntar a dos alumnos distintos y no alargarlo más de cinco minutos.</a:t>
+            </a:r>
+            <a:endParaRPr lang="en-US" dirty="0"/>
+          </a:p>
+        </p:txBody>
+      </p:sp>
+      <p:sp>
+        <p:nvSpPr>
+          <p:cNvPr id="4" name="Slide Number Placeholder 3"/>
+          <p:cNvSpPr>
+            <a:spLocks noGrp="1"/>
+          </p:cNvSpPr>
+          <p:nvPr>
+            <p:ph type="sldNum" sz="quarter" idx="10"/>
+          </p:nvPr>
+        </p:nvSpPr>
+        <p:spPr/>
+        <p:txBody>
+          <a:bodyPr/>
+          <a:lstStyle/>
+          <a:p>
+            <a:fld id="{F7021451-1387-4CA6-816F-3879F97B5CBC}" type="slidenum">
+              <a:rPr lang="en-US"/>
+              <a:t>1</a:t>
             </a:fld>
             <a:endParaRPr lang="en-US"/>
           </a:p>
@@ -4017,7 +4106,7 @@
                 <a:ea typeface="Calibri" pitchFamily="34" charset="-122"/>
                 <a:cs typeface="Calibri" pitchFamily="34" charset="-120"/>
               </a:rPr>
-              <a:t>10</a:t>
+              <a:t>11</a:t>
             </a:r>
             <a:endParaRPr lang="en-US" sz="900" dirty="0"/>
           </a:p>
@@ -4205,7 +4294,7 @@
                 <a:ea typeface="Calibri" pitchFamily="34" charset="-122"/>
                 <a:cs typeface="Calibri" pitchFamily="34" charset="-120"/>
               </a:rPr>
-              <a:t>11</a:t>
+              <a:t>12</a:t>
             </a:r>
             <a:endParaRPr lang="en-US" sz="900" dirty="0"/>
           </a:p>
@@ -4524,7 +4613,7 @@
                 <a:ea typeface="Calibri" pitchFamily="34" charset="-122"/>
                 <a:cs typeface="Calibri" pitchFamily="34" charset="-120"/>
               </a:rPr>
-              <a:t>12</a:t>
+              <a:t>13</a:t>
             </a:r>
             <a:endParaRPr lang="en-US" sz="900" dirty="0"/>
           </a:p>
@@ -4920,7 +5009,7 @@
                 <a:ea typeface="Calibri" pitchFamily="34" charset="-122"/>
                 <a:cs typeface="Calibri" pitchFamily="34" charset="-120"/>
               </a:rPr>
-              <a:t>13</a:t>
+              <a:t>14</a:t>
             </a:r>
             <a:endParaRPr lang="en-US" sz="900" dirty="0"/>
           </a:p>
@@ -6169,7 +6258,7 @@
                 <a:ea typeface="Calibri" pitchFamily="34" charset="-122"/>
                 <a:cs typeface="Calibri" pitchFamily="34" charset="-120"/>
               </a:rPr>
-              <a:t>14</a:t>
+              <a:t>15</a:t>
             </a:r>
             <a:endParaRPr lang="en-US" sz="900" dirty="0"/>
           </a:p>
@@ -6648,7 +6737,7 @@
                 <a:ea typeface="Calibri" pitchFamily="34" charset="-122"/>
                 <a:cs typeface="Calibri" pitchFamily="34" charset="-120"/>
               </a:rPr>
-              <a:t>15</a:t>
+              <a:t>16</a:t>
             </a:r>
             <a:endParaRPr lang="en-US" sz="900" dirty="0"/>
           </a:p>
@@ -7076,7 +7165,7 @@
                 <a:ea typeface="Calibri" pitchFamily="34" charset="-122"/>
                 <a:cs typeface="Calibri" pitchFamily="34" charset="-120"/>
               </a:rPr>
-              <a:t>16</a:t>
+              <a:t>17</a:t>
             </a:r>
             <a:endParaRPr lang="en-US" sz="900" dirty="0"/>
           </a:p>
@@ -7559,7 +7648,7 @@
                 <a:ea typeface="Calibri" pitchFamily="34" charset="-122"/>
                 <a:cs typeface="Calibri" pitchFamily="34" charset="-120"/>
               </a:rPr>
-              <a:t>17</a:t>
+              <a:t>18</a:t>
             </a:r>
             <a:endParaRPr lang="en-US" sz="900" dirty="0"/>
           </a:p>
@@ -7878,7 +7967,7 @@
                 <a:ea typeface="Calibri" pitchFamily="34" charset="-122"/>
                 <a:cs typeface="Calibri" pitchFamily="34" charset="-120"/>
               </a:rPr>
-              <a:t>18</a:t>
+              <a:t>19</a:t>
             </a:r>
             <a:endParaRPr lang="en-US" sz="900" dirty="0"/>
           </a:p>
@@ -8722,7 +8811,7 @@
                 <a:ea typeface="Calibri" pitchFamily="34" charset="-122"/>
                 <a:cs typeface="Calibri" pitchFamily="34" charset="-120"/>
               </a:rPr>
-              <a:t>19</a:t>
+              <a:t>20</a:t>
             </a:r>
             <a:endParaRPr lang="en-US" sz="900" dirty="0"/>
           </a:p>
@@ -13293,7 +13382,7 @@
                 <a:ea typeface="Calibri" pitchFamily="34" charset="-122"/>
                 <a:cs typeface="Calibri" pitchFamily="34" charset="-120"/>
               </a:rPr>
-              <a:t>20</a:t>
+              <a:t>21</a:t>
             </a:r>
             <a:endParaRPr lang="en-US" sz="900" dirty="0"/>
           </a:p>
@@ -14137,7 +14226,7 @@
                 <a:ea typeface="Calibri" pitchFamily="34" charset="-122"/>
                 <a:cs typeface="Calibri" pitchFamily="34" charset="-120"/>
               </a:rPr>
-              <a:t>21</a:t>
+              <a:t>22</a:t>
             </a:r>
             <a:endParaRPr lang="en-US" sz="900" dirty="0"/>
           </a:p>
@@ -14565,7 +14654,7 @@
                 <a:ea typeface="Calibri" pitchFamily="34" charset="-122"/>
                 <a:cs typeface="Calibri" pitchFamily="34" charset="-120"/>
               </a:rPr>
-              <a:t>22</a:t>
+              <a:t>23</a:t>
             </a:r>
             <a:endParaRPr lang="en-US" sz="900" dirty="0"/>
           </a:p>
@@ -15126,7 +15215,7 @@
                 <a:ea typeface="Calibri" pitchFamily="34" charset="-122"/>
                 <a:cs typeface="Calibri" pitchFamily="34" charset="-120"/>
               </a:rPr>
-              <a:t>23</a:t>
+              <a:t>24</a:t>
             </a:r>
             <a:endParaRPr lang="en-US" sz="900" dirty="0"/>
           </a:p>
@@ -15587,7 +15676,7 @@
                 <a:ea typeface="Calibri" pitchFamily="34" charset="-122"/>
                 <a:cs typeface="Calibri" pitchFamily="34" charset="-120"/>
               </a:rPr>
-              <a:t>24</a:t>
+              <a:t>25</a:t>
             </a:r>
             <a:endParaRPr lang="en-US" sz="900" dirty="0"/>
           </a:p>
@@ -16275,7 +16364,7 @@
                 <a:ea typeface="Calibri" pitchFamily="34" charset="-122"/>
                 <a:cs typeface="Calibri" pitchFamily="34" charset="-120"/>
               </a:rPr>
-              <a:t>25</a:t>
+              <a:t>26</a:t>
             </a:r>
             <a:endParaRPr lang="en-US" sz="900" dirty="0"/>
           </a:p>
@@ -16963,7 +17052,7 @@
                 <a:ea typeface="Calibri" pitchFamily="34" charset="-122"/>
                 <a:cs typeface="Calibri" pitchFamily="34" charset="-120"/>
               </a:rPr>
-              <a:t>26</a:t>
+              <a:t>27</a:t>
             </a:r>
             <a:endParaRPr lang="en-US" sz="900" dirty="0"/>
           </a:p>
@@ -17532,7 +17621,523 @@
                 <a:ea typeface="Calibri" pitchFamily="34" charset="-122"/>
                 <a:cs typeface="Calibri" pitchFamily="34" charset="-120"/>
               </a:rPr>
-              <a:t>27</a:t>
+              <a:t>28</a:t>
+            </a:r>
+            <a:endParaRPr lang="en-US" sz="900" dirty="0"/>
+          </a:p>
+        </p:txBody>
+      </p:sp>
+    </p:spTree>
+  </p:cSld>
+  <p:clrMapOvr>
+    <a:masterClrMapping/>
+  </p:clrMapOvr>
+</p:sld>
+</file>
+
+<file path=ppt/slides/slide28.xml><?xml version="1.0" encoding="utf-8"?>
+<p:sld xmlns:a="http://schemas.openxmlformats.org/drawingml/2006/main" xmlns:r="http://schemas.openxmlformats.org/officeDocument/2006/relationships" xmlns:p="http://schemas.openxmlformats.org/presentationml/2006/main">
+  <p:cSld name="Slide 3">
+    <p:bg>
+      <p:bgPr>
+        <a:solidFill>
+          <a:srgbClr val="FFFFFF"/>
+        </a:solidFill>
+      </p:bgPr>
+    </p:bg>
+    <p:spTree>
+      <p:nvGrpSpPr>
+        <p:cNvPr id="1" name=""/>
+        <p:cNvGrpSpPr/>
+        <p:nvPr/>
+      </p:nvGrpSpPr>
+      <p:grpSpPr>
+        <a:xfrm>
+          <a:off x="0" y="0"/>
+          <a:ext cx="0" cy="0"/>
+          <a:chOff x="0" y="0"/>
+          <a:chExt cx="0" cy="0"/>
+        </a:xfrm>
+      </p:grpSpPr>
+      <p:sp>
+        <p:nvSpPr>
+          <p:cNvPr id="2" name="Text 0"/>
+          <p:cNvSpPr txBox="1"/>
+          <p:nvPr/>
+        </p:nvSpPr>
+        <p:spPr>
+          <a:xfrm>
+            <a:off x="548640" y="347472"/>
+            <a:ext cx="10058400" cy="274320"/>
+          </a:xfrm>
+          <a:prstGeom prst="rect">
+            <a:avLst/>
+          </a:prstGeom>
+          <a:noFill/>
+          <a:ln/>
+        </p:spPr>
+        <p:txBody>
+          <a:bodyPr wrap="square" lIns="0" tIns="0" rIns="0" bIns="0" rtlCol="0" anchor="ctr"/>
+          <a:lstStyle/>
+          <a:p>
+            <a:pPr indent="0" marL="0">
+              <a:buNone/>
+            </a:pPr>
+            <a:r>
+              <a:rPr lang="en-US" sz="1200" b="1" spc="200" kern="0" dirty="0">
+                <a:solidFill>
+                  <a:srgbClr val="742774"/>
+                </a:solidFill>
+                <a:latin typeface="Calibri" pitchFamily="34" charset="0"/>
+                <a:ea typeface="Calibri" pitchFamily="34" charset="-122"/>
+                <a:cs typeface="Calibri" pitchFamily="34" charset="-120"/>
+              </a:rPr>
+              <a:t>DOS PREGUNTAS</a:t>
+            </a:r>
+            <a:endParaRPr lang="en-US" sz="1200" dirty="0"/>
+          </a:p>
+        </p:txBody>
+      </p:sp>
+      <p:sp>
+        <p:nvSpPr>
+          <p:cNvPr id="3" name="Text 1"/>
+          <p:cNvSpPr txBox="1"/>
+          <p:nvPr/>
+        </p:nvSpPr>
+        <p:spPr>
+          <a:xfrm>
+            <a:off x="548640" y="621792"/>
+            <a:ext cx="11064240" cy="685800"/>
+          </a:xfrm>
+          <a:prstGeom prst="rect">
+            <a:avLst/>
+          </a:prstGeom>
+          <a:noFill/>
+          <a:ln/>
+        </p:spPr>
+        <p:txBody>
+          <a:bodyPr wrap="square" lIns="0" tIns="0" rIns="0" bIns="0" rtlCol="0" anchor="t"/>
+          <a:lstStyle/>
+          <a:p>
+            <a:pPr indent="0" marL="0">
+              <a:buNone/>
+            </a:pPr>
+            <a:r>
+              <a:rPr lang="en-US" sz="3000" b="1" dirty="0">
+                <a:solidFill>
+                  <a:srgbClr val="2E1437"/>
+                </a:solidFill>
+                <a:latin typeface="Cambria" pitchFamily="34" charset="0"/>
+                <a:ea typeface="Cambria" pitchFamily="34" charset="-122"/>
+                <a:cs typeface="Cambria" pitchFamily="34" charset="-120"/>
+              </a:rPr>
+              <a:t>Antes de empezar, de la Sesión 3</a:t>
+            </a:r>
+            <a:endParaRPr lang="en-US" sz="3000" dirty="0"/>
+          </a:p>
+        </p:txBody>
+      </p:sp>
+      <p:sp>
+        <p:nvSpPr>
+          <p:cNvPr id="4" name="Shape 2"/>
+          <p:cNvSpPr/>
+          <p:nvPr/>
+        </p:nvSpPr>
+        <p:spPr>
+          <a:xfrm>
+            <a:off x="548640" y="2148840"/>
+            <a:ext cx="5120640" cy="3383280"/>
+          </a:xfrm>
+          <a:prstGeom prst="roundRect">
+            <a:avLst>
+              <a:gd name="adj" fmla="val 4286"/>
+            </a:avLst>
+          </a:prstGeom>
+          <a:solidFill>
+            <a:srgbClr val="F7F3F8"/>
+          </a:solidFill>
+          <a:ln w="9525">
+            <a:solidFill>
+              <a:srgbClr val="E6DDE9"/>
+            </a:solidFill>
+            <a:prstDash val="solid"/>
+          </a:ln>
+        </p:spPr>
+      </p:sp>
+      <p:sp>
+        <p:nvSpPr>
+          <p:cNvPr id="5" name="Shape 3"/>
+          <p:cNvSpPr/>
+          <p:nvPr/>
+        </p:nvSpPr>
+        <p:spPr>
+          <a:xfrm>
+            <a:off x="822960" y="2423160"/>
+            <a:ext cx="566928" cy="566928"/>
+          </a:xfrm>
+          <a:prstGeom prst="ellipse">
+            <a:avLst/>
+          </a:prstGeom>
+          <a:solidFill>
+            <a:srgbClr val="742774"/>
+          </a:solidFill>
+          <a:ln/>
+        </p:spPr>
+      </p:sp>
+      <p:sp>
+        <p:nvSpPr>
+          <p:cNvPr id="6" name="Text 4"/>
+          <p:cNvSpPr txBox="1"/>
+          <p:nvPr/>
+        </p:nvSpPr>
+        <p:spPr>
+          <a:xfrm>
+            <a:off x="822960" y="2423160"/>
+            <a:ext cx="566928" cy="566928"/>
+          </a:xfrm>
+          <a:prstGeom prst="rect">
+            <a:avLst/>
+          </a:prstGeom>
+          <a:noFill/>
+          <a:ln/>
+        </p:spPr>
+        <p:txBody>
+          <a:bodyPr wrap="square" lIns="0" tIns="0" rIns="0" bIns="0" rtlCol="0" anchor="ctr"/>
+          <a:lstStyle/>
+          <a:p>
+            <a:pPr algn="ctr" indent="0" marL="0">
+              <a:buNone/>
+            </a:pPr>
+            <a:r>
+              <a:rPr lang="en-US" sz="1800" b="1" dirty="0">
+                <a:solidFill>
+                  <a:srgbClr val="FFFFFF"/>
+                </a:solidFill>
+                <a:latin typeface="Cambria" pitchFamily="34" charset="0"/>
+                <a:ea typeface="Cambria" pitchFamily="34" charset="-122"/>
+                <a:cs typeface="Cambria" pitchFamily="34" charset="-120"/>
+              </a:rPr>
+              <a:t>1</a:t>
+            </a:r>
+            <a:endParaRPr lang="en-US" sz="1800" dirty="0"/>
+          </a:p>
+        </p:txBody>
+      </p:sp>
+      <p:sp>
+        <p:nvSpPr>
+          <p:cNvPr id="7" name="Text 5"/>
+          <p:cNvSpPr txBox="1"/>
+          <p:nvPr/>
+        </p:nvSpPr>
+        <p:spPr>
+          <a:xfrm>
+            <a:off x="822960" y="3108960"/>
+            <a:ext cx="4572000" cy="640080"/>
+          </a:xfrm>
+          <a:prstGeom prst="rect">
+            <a:avLst/>
+          </a:prstGeom>
+          <a:noFill/>
+          <a:ln/>
+        </p:spPr>
+        <p:txBody>
+          <a:bodyPr wrap="square" lIns="0" tIns="0" rIns="0" bIns="0" rtlCol="0" anchor="t"/>
+          <a:lstStyle/>
+          <a:p>
+            <a:pPr indent="0" marL="0">
+              <a:buNone/>
+            </a:pPr>
+            <a:r>
+              <a:rPr lang="en-US" sz="1800" b="1" dirty="0">
+                <a:solidFill>
+                  <a:srgbClr val="2E1437"/>
+                </a:solidFill>
+                <a:latin typeface="Cambria" pitchFamily="34" charset="0"/>
+                <a:ea typeface="Cambria" pitchFamily="34" charset="-122"/>
+                <a:cs typeface="Cambria" pitchFamily="34" charset="-120"/>
+              </a:rPr>
+              <a:t>¿Componente o copiar y pegar?</a:t>
+            </a:r>
+            <a:endParaRPr lang="en-US" sz="1800" dirty="0"/>
+          </a:p>
+        </p:txBody>
+      </p:sp>
+      <p:sp>
+        <p:nvSpPr>
+          <p:cNvPr id="8" name="Text 6"/>
+          <p:cNvSpPr txBox="1"/>
+          <p:nvPr/>
+        </p:nvSpPr>
+        <p:spPr>
+          <a:xfrm>
+            <a:off x="822960" y="3794760"/>
+            <a:ext cx="4572000" cy="1554480"/>
+          </a:xfrm>
+          <a:prstGeom prst="rect">
+            <a:avLst/>
+          </a:prstGeom>
+          <a:noFill/>
+          <a:ln/>
+        </p:spPr>
+        <p:txBody>
+          <a:bodyPr wrap="square" lIns="0" tIns="0" rIns="0" bIns="0" rtlCol="0" anchor="t"/>
+          <a:lstStyle/>
+          <a:p>
+            <a:pPr indent="0" marL="0">
+              <a:buNone/>
+            </a:pPr>
+            <a:r>
+              <a:rPr lang="en-US" sz="1350" dirty="0">
+                <a:solidFill>
+                  <a:srgbClr val="2B2B33"/>
+                </a:solidFill>
+                <a:latin typeface="Calibri" pitchFamily="34" charset="0"/>
+                <a:ea typeface="Calibri" pitchFamily="34" charset="-122"/>
+                <a:cs typeface="Calibri" pitchFamily="34" charset="-120"/>
+              </a:rPr>
+              <a:t>Tienes la misma cabecera en seis pantallas y te piden cambiarle el color. ¿Qué habrías hecho en la Sesión 3 para no tocar seis pantallas?</a:t>
+            </a:r>
+            <a:endParaRPr lang="en-US" sz="1350" dirty="0"/>
+          </a:p>
+        </p:txBody>
+      </p:sp>
+      <p:sp>
+        <p:nvSpPr>
+          <p:cNvPr id="9" name="Shape 7"/>
+          <p:cNvSpPr/>
+          <p:nvPr/>
+        </p:nvSpPr>
+        <p:spPr>
+          <a:xfrm>
+            <a:off x="6492240" y="2148840"/>
+            <a:ext cx="5120640" cy="3383280"/>
+          </a:xfrm>
+          <a:prstGeom prst="roundRect">
+            <a:avLst>
+              <a:gd name="adj" fmla="val 4286"/>
+            </a:avLst>
+          </a:prstGeom>
+          <a:solidFill>
+            <a:srgbClr val="F7F3F8"/>
+          </a:solidFill>
+          <a:ln w="9525">
+            <a:solidFill>
+              <a:srgbClr val="E6DDE9"/>
+            </a:solidFill>
+            <a:prstDash val="solid"/>
+          </a:ln>
+        </p:spPr>
+      </p:sp>
+      <p:sp>
+        <p:nvSpPr>
+          <p:cNvPr id="10" name="Shape 8"/>
+          <p:cNvSpPr/>
+          <p:nvPr/>
+        </p:nvSpPr>
+        <p:spPr>
+          <a:xfrm>
+            <a:off x="6766560" y="2423160"/>
+            <a:ext cx="566928" cy="566928"/>
+          </a:xfrm>
+          <a:prstGeom prst="ellipse">
+            <a:avLst/>
+          </a:prstGeom>
+          <a:solidFill>
+            <a:srgbClr val="742774"/>
+          </a:solidFill>
+          <a:ln/>
+        </p:spPr>
+      </p:sp>
+      <p:sp>
+        <p:nvSpPr>
+          <p:cNvPr id="11" name="Text 9"/>
+          <p:cNvSpPr txBox="1"/>
+          <p:nvPr/>
+        </p:nvSpPr>
+        <p:spPr>
+          <a:xfrm>
+            <a:off x="6766560" y="2423160"/>
+            <a:ext cx="566928" cy="566928"/>
+          </a:xfrm>
+          <a:prstGeom prst="rect">
+            <a:avLst/>
+          </a:prstGeom>
+          <a:noFill/>
+          <a:ln/>
+        </p:spPr>
+        <p:txBody>
+          <a:bodyPr wrap="square" lIns="0" tIns="0" rIns="0" bIns="0" rtlCol="0" anchor="ctr"/>
+          <a:lstStyle/>
+          <a:p>
+            <a:pPr algn="ctr" indent="0" marL="0">
+              <a:buNone/>
+            </a:pPr>
+            <a:r>
+              <a:rPr lang="en-US" sz="1800" b="1" dirty="0">
+                <a:solidFill>
+                  <a:srgbClr val="FFFFFF"/>
+                </a:solidFill>
+                <a:latin typeface="Cambria" pitchFamily="34" charset="0"/>
+                <a:ea typeface="Cambria" pitchFamily="34" charset="-122"/>
+                <a:cs typeface="Cambria" pitchFamily="34" charset="-120"/>
+              </a:rPr>
+              <a:t>2</a:t>
+            </a:r>
+            <a:endParaRPr lang="en-US" sz="1800" dirty="0"/>
+          </a:p>
+        </p:txBody>
+      </p:sp>
+      <p:sp>
+        <p:nvSpPr>
+          <p:cNvPr id="12" name="Text 10"/>
+          <p:cNvSpPr txBox="1"/>
+          <p:nvPr/>
+        </p:nvSpPr>
+        <p:spPr>
+          <a:xfrm>
+            <a:off x="6766560" y="3108960"/>
+            <a:ext cx="4572000" cy="640080"/>
+          </a:xfrm>
+          <a:prstGeom prst="rect">
+            <a:avLst/>
+          </a:prstGeom>
+          <a:noFill/>
+          <a:ln/>
+        </p:spPr>
+        <p:txBody>
+          <a:bodyPr wrap="square" lIns="0" tIns="0" rIns="0" bIns="0" rtlCol="0" anchor="t"/>
+          <a:lstStyle/>
+          <a:p>
+            <a:pPr indent="0" marL="0">
+              <a:buNone/>
+            </a:pPr>
+            <a:r>
+              <a:rPr lang="en-US" sz="1800" b="1" dirty="0">
+                <a:solidFill>
+                  <a:srgbClr val="2E1437"/>
+                </a:solidFill>
+                <a:latin typeface="Cambria" pitchFamily="34" charset="0"/>
+                <a:ea typeface="Cambria" pitchFamily="34" charset="-122"/>
+                <a:cs typeface="Cambria" pitchFamily="34" charset="-120"/>
+              </a:rPr>
+              <a:t>¿Dónde va la validación?</a:t>
+            </a:r>
+            <a:endParaRPr lang="en-US" sz="1800" dirty="0"/>
+          </a:p>
+        </p:txBody>
+      </p:sp>
+      <p:sp>
+        <p:nvSpPr>
+          <p:cNvPr id="13" name="Text 11"/>
+          <p:cNvSpPr txBox="1"/>
+          <p:nvPr/>
+        </p:nvSpPr>
+        <p:spPr>
+          <a:xfrm>
+            <a:off x="6766560" y="3794760"/>
+            <a:ext cx="4572000" cy="1554480"/>
+          </a:xfrm>
+          <a:prstGeom prst="rect">
+            <a:avLst/>
+          </a:prstGeom>
+          <a:noFill/>
+          <a:ln/>
+        </p:spPr>
+        <p:txBody>
+          <a:bodyPr wrap="square" lIns="0" tIns="0" rIns="0" bIns="0" rtlCol="0" anchor="t"/>
+          <a:lstStyle/>
+          <a:p>
+            <a:pPr indent="0" marL="0">
+              <a:buNone/>
+            </a:pPr>
+            <a:r>
+              <a:rPr lang="en-US" sz="1350" dirty="0">
+                <a:solidFill>
+                  <a:srgbClr val="2B2B33"/>
+                </a:solidFill>
+                <a:latin typeface="Calibri" pitchFamily="34" charset="0"/>
+                <a:ea typeface="Calibri" pitchFamily="34" charset="-122"/>
+                <a:cs typeface="Calibri" pitchFamily="34" charset="-120"/>
+              </a:rPr>
+              <a:t>¿Qué diferencia hay entre marcar un campo como obligatorio en el origen de datos y validarlo en la app con un mensaje por campo?</a:t>
+            </a:r>
+            <a:endParaRPr lang="en-US" sz="1350" dirty="0"/>
+          </a:p>
+        </p:txBody>
+      </p:sp>
+      <p:sp>
+        <p:nvSpPr>
+          <p:cNvPr id="24" name="Text 22"/>
+          <p:cNvSpPr txBox="1"/>
+          <p:nvPr/>
+        </p:nvSpPr>
+        <p:spPr>
+          <a:xfrm>
+            <a:off x="548640" y="6473952"/>
+            <a:ext cx="8229600" cy="228600"/>
+          </a:xfrm>
+          <a:prstGeom prst="rect">
+            <a:avLst/>
+          </a:prstGeom>
+          <a:noFill/>
+          <a:ln/>
+        </p:spPr>
+        <p:txBody>
+          <a:bodyPr wrap="square" lIns="0" tIns="0" rIns="0" bIns="0" rtlCol="0" anchor="ctr"/>
+          <a:lstStyle/>
+          <a:p>
+            <a:pPr indent="0" marL="0">
+              <a:buNone/>
+            </a:pPr>
+            <a:r>
+              <a:rPr lang="en-US" sz="900" dirty="0">
+                <a:solidFill>
+                  <a:srgbClr val="6B6875"/>
+                </a:solidFill>
+                <a:latin typeface="Calibri" pitchFamily="34" charset="0"/>
+                <a:ea typeface="Calibri" pitchFamily="34" charset="-122"/>
+                <a:cs typeface="Calibri" pitchFamily="34" charset="-120"/>
+              </a:rPr>
+              <a:t>Curso Power Apps · Sesión 4 · Automatización, aprobaciones y mantenimiento</a:t>
+            </a:r>
+            <a:endParaRPr lang="en-US" sz="900" dirty="0"/>
+          </a:p>
+        </p:txBody>
+      </p:sp>
+      <p:sp>
+        <p:nvSpPr>
+          <p:cNvPr id="25" name="Text 23"/>
+          <p:cNvSpPr txBox="1"/>
+          <p:nvPr/>
+        </p:nvSpPr>
+        <p:spPr>
+          <a:xfrm>
+            <a:off x="11185855" y="6473952"/>
+            <a:ext cx="457200" cy="228600"/>
+          </a:xfrm>
+          <a:prstGeom prst="rect">
+            <a:avLst/>
+          </a:prstGeom>
+          <a:noFill/>
+          <a:ln/>
+        </p:spPr>
+        <p:txBody>
+          <a:bodyPr wrap="square" lIns="0" tIns="0" rIns="0" bIns="0" rtlCol="0" anchor="ctr"/>
+          <a:lstStyle/>
+          <a:p>
+            <a:pPr algn="r" indent="0" marL="0">
+              <a:buNone/>
+            </a:pPr>
+            <a:r>
+              <a:rPr lang="en-US" sz="900" dirty="0">
+                <a:solidFill>
+                  <a:srgbClr val="6B6875"/>
+                </a:solidFill>
+                <a:latin typeface="Calibri" pitchFamily="34" charset="0"/>
+                <a:ea typeface="Calibri" pitchFamily="34" charset="-122"/>
+                <a:cs typeface="Calibri" pitchFamily="34" charset="-120"/>
+              </a:rPr>
+              <a:t>4</a:t>
             </a:r>
             <a:endParaRPr lang="en-US" sz="900" dirty="0"/>
           </a:p>
@@ -18695,7 +19300,7 @@
                 <a:ea typeface="Calibri" pitchFamily="34" charset="-122"/>
                 <a:cs typeface="Calibri" pitchFamily="34" charset="-120"/>
               </a:rPr>
-              <a:t>4</a:t>
+              <a:t>5</a:t>
             </a:r>
             <a:endParaRPr lang="en-US" sz="900" dirty="0"/>
           </a:p>
@@ -19123,7 +19728,7 @@
                 <a:ea typeface="Calibri" pitchFamily="34" charset="-122"/>
                 <a:cs typeface="Calibri" pitchFamily="34" charset="-120"/>
               </a:rPr>
-              <a:t>5</a:t>
+              <a:t>6</a:t>
             </a:r>
             <a:endParaRPr lang="en-US" sz="900" dirty="0"/>
           </a:p>
@@ -20372,7 +20977,7 @@
                 <a:ea typeface="Calibri" pitchFamily="34" charset="-122"/>
                 <a:cs typeface="Calibri" pitchFamily="34" charset="-120"/>
               </a:rPr>
-              <a:t>6</a:t>
+              <a:t>7</a:t>
             </a:r>
             <a:endParaRPr lang="en-US" sz="900" dirty="0"/>
           </a:p>
@@ -20800,7 +21405,7 @@
                 <a:ea typeface="Calibri" pitchFamily="34" charset="-122"/>
                 <a:cs typeface="Calibri" pitchFamily="34" charset="-120"/>
               </a:rPr>
-              <a:t>7</a:t>
+              <a:t>8</a:t>
             </a:r>
             <a:endParaRPr lang="en-US" sz="900" dirty="0"/>
           </a:p>
@@ -21332,7 +21937,7 @@
                 <a:ea typeface="Calibri" pitchFamily="34" charset="-122"/>
                 <a:cs typeface="Calibri" pitchFamily="34" charset="-120"/>
               </a:rPr>
-              <a:t>8</a:t>
+              <a:t>9</a:t>
             </a:r>
             <a:endParaRPr lang="en-US" sz="900" dirty="0"/>
           </a:p>
@@ -21793,7 +22398,7 @@
                 <a:ea typeface="Calibri" pitchFamily="34" charset="-122"/>
                 <a:cs typeface="Calibri" pitchFamily="34" charset="-120"/>
               </a:rPr>
-              <a:t>9</a:t>
+              <a:t>10</a:t>
             </a:r>
             <a:endParaRPr lang="en-US" sz="900" dirty="0"/>
           </a:p>

--- a/SESION_4/Sesion_4_Automatizacion_aprobaciones_mantenimiento.pptx
+++ b/SESION_4/Sesion_4_Automatizacion_aprobaciones_mantenimiento.pptx
@@ -6890,7 +6890,7 @@
                 <a:ea typeface="Calibri" pitchFamily="34" charset="-122"/>
                 <a:cs typeface="Calibri" pitchFamily="34" charset="-120"/>
               </a:rPr>
-              <a:t>SharePoint: </a:t>
+              <a:t>Programación: </a:t>
             </a:r>
             <a:r>
               <a:rPr lang="en-US" sz="1600" dirty="0">
@@ -6901,7 +6901,7 @@
                 <a:ea typeface="Calibri" pitchFamily="34" charset="-122"/>
                 <a:cs typeface="Calibri" pitchFamily="34" charset="-120"/>
               </a:rPr>
-              <a:t>Cuando se crea un elemento con estado Pendiente.</a:t>
+              <a:t>Cada 5 minutos, buscar filas con estado Pendiente.</a:t>
             </a:r>
             <a:endParaRPr lang="en-US" sz="1600" dirty="0"/>
           </a:p>
@@ -6986,7 +6986,7 @@
                 <a:ea typeface="Calibri" pitchFamily="34" charset="-122"/>
                 <a:cs typeface="Calibri" pitchFamily="34" charset="-120"/>
               </a:rPr>
-              <a:t>SharePoint: </a:t>
+              <a:t>Excel: </a:t>
             </a:r>
             <a:r>
               <a:rPr lang="en-US" sz="1600" dirty="0">
@@ -6997,7 +6997,7 @@
                 <a:ea typeface="Calibri" pitchFamily="34" charset="-122"/>
                 <a:cs typeface="Calibri" pitchFamily="34" charset="-120"/>
               </a:rPr>
-              <a:t>Actualizar elemento con estado y comentarios.</a:t>
+              <a:t>Actualizar la fila del Excel por su Id con estado y comentarios.</a:t>
             </a:r>
             <a:endParaRPr lang="en-US" sz="1600" dirty="0"/>
           </a:p>
@@ -13186,7 +13186,7 @@
                           <a:ea typeface="Calibri" pitchFamily="34" charset="-122"/>
                           <a:cs typeface="Calibri" pitchFamily="34" charset="-120"/>
                         </a:rPr>
-                        <a:t>Datos (SharePoint)</a:t>
+                        <a:t>Datos (archivo de Excel)</a:t>
                       </a:r>
                       <a:endParaRPr lang="en-US" sz="1300" dirty="0">
                         <a:latin typeface="Calibri" charset="0"/>
@@ -13254,7 +13254,7 @@
                           <a:ea typeface="Calibri" pitchFamily="34" charset="-122"/>
                           <a:cs typeface="Calibri" pitchFamily="34" charset="-120"/>
                         </a:rPr>
-                        <a:t>Aparte: el usuario necesita permiso en el sitio o la lista para leer y escribir</a:t>
+                        <a:t>Aparte: el usuario necesita permiso sobre el archivo de OneDrive para leer y escribir</a:t>
                       </a:r>
                       <a:endParaRPr lang="en-US" sz="1300" dirty="0">
                         <a:latin typeface="Calibri" charset="0"/>
@@ -13820,7 +13820,7 @@
                 <a:ea typeface="Calibri" pitchFamily="34" charset="-122"/>
                 <a:cs typeface="Calibri" pitchFamily="34" charset="-120"/>
               </a:rPr>
-              <a:t>El sitio y la lista de SharePoint cambian por entorno sin tocar la app.</a:t>
+              <a:t>La ruta del archivo cambia por entorno sin tocar la app ni el flujo.</a:t>
             </a:r>
             <a:endParaRPr lang="en-US" sz="1350" dirty="0"/>
           </a:p>
@@ -14825,7 +14825,7 @@
                 <a:ea typeface="Calibri" pitchFamily="34" charset="-122"/>
                 <a:cs typeface="Calibri" pitchFamily="34" charset="-120"/>
               </a:rPr>
-              <a:t>15 minutos · portal de Power Apps, SharePoint y Centro de administración</a:t>
+              <a:t>15 minutos · portal de Power Apps, OneDrive y Centro de administración</a:t>
             </a:r>
             <a:endParaRPr lang="en-US" sz="1300" dirty="0"/>
           </a:p>
@@ -14957,7 +14957,7 @@
                 <a:ea typeface="Calibri" pitchFamily="34" charset="-122"/>
                 <a:cs typeface="Calibri" pitchFamily="34" charset="-120"/>
               </a:rPr>
-              <a:t>Crear una variable de entorno de SharePoint</a:t>
+              <a:t>Crear una variable de entorno con la ruta del archivo</a:t>
             </a:r>
             <a:endParaRPr lang="en-US" sz="1450" dirty="0"/>
           </a:p>
@@ -15518,7 +15518,7 @@
                 <a:ea typeface="Calibri" pitchFamily="34" charset="-122"/>
                 <a:cs typeface="Calibri" pitchFamily="34" charset="-120"/>
               </a:rPr>
-              <a:t>Versiones, compartir y permisos en SharePoint</a:t>
+              <a:t>Versiones, compartir y permisos sobre el archivo</a:t>
             </a:r>
             <a:endParaRPr lang="en-US" sz="1450" dirty="0"/>
           </a:p>
@@ -16724,7 +16724,7 @@
                 <a:ea typeface="Calibri" pitchFamily="34" charset="-122"/>
                 <a:cs typeface="Calibri" pitchFamily="34" charset="-120"/>
               </a:rPr>
-              <a:t>Le falta permiso en la lista de SharePoint</a:t>
+              <a:t>Le falta permiso sobre el archivo de Excel</a:t>
             </a:r>
             <a:endParaRPr lang="en-US" sz="1600" dirty="0"/>
           </a:p>
@@ -17265,7 +17265,7 @@
                 <a:ea typeface="Calibri" pitchFamily="34" charset="-122"/>
                 <a:cs typeface="Calibri" pitchFamily="34" charset="-120"/>
               </a:rPr>
-              <a:t>Power Apps para capturar y consultar; SharePoint como repositorio; Power Automate para notificar y aprobar.</a:t>
+              <a:t>Power Apps para capturar y consultar; Excel en OneDrive como repositorio; Power Automate para notificar y aprobar.</a:t>
             </a:r>
             <a:endParaRPr lang="en-US" sz="1700" dirty="0"/>
           </a:p>
@@ -20231,7 +20231,7 @@
                           <a:ea typeface="Calibri" pitchFamily="34" charset="-122"/>
                           <a:cs typeface="Calibri" pitchFamily="34" charset="-120"/>
                         </a:rPr>
-                        <a:t>Al crear una solicitud en SharePoint, pedir aprobación</a:t>
+                        <a:t>Al crear un elemento en SharePoint o Dataverse, pedir aprobación</a:t>
                       </a:r>
                       <a:endParaRPr lang="en-US" sz="1300" dirty="0">
                         <a:latin typeface="Calibri" charset="0"/>
@@ -20643,7 +20643,7 @@
                           <a:ea typeface="Calibri" pitchFamily="34" charset="-122"/>
                           <a:cs typeface="Calibri" pitchFamily="34" charset="-120"/>
                         </a:rPr>
-                        <a:t>Cada lunes, recordar solicitudes pendientes</a:t>
+                        <a:t>Cada 5 minutos, buscar solicitudes pendientes en el Excel</a:t>
                       </a:r>
                       <a:endParaRPr lang="en-US" sz="1300" dirty="0">
                         <a:latin typeface="Calibri" charset="0"/>
